--- a/assets/pptx/catalog-635.pptx
+++ b/assets/pptx/catalog-635.pptx
@@ -3241,7 +3241,7 @@
                 <a:ea typeface="Ebrima"/>
                 <a:cs typeface="Ebrima"/>
               </a:rPr>
-              <a:t>የማይተው ነው የእኔ ወዳጅ አሳልፉ በክፉ እጅ የማምለጫ ዓለት ሆነኝ በደግ እጁ ከፍ አረገኝ (2x)</a:t>
+              <a:t>የማይተው ነው የእኔ ወዳጅ አሳልፉ በክፉ እጅ የማምለጫ ዓለት ሆነኝ በደግ እጁ ከፍ አረገኝ 2x</a:t>
             </a:r>
           </a:p>
           <a:p>
@@ -3277,7 +3277,7 @@
                 <a:ea typeface="Ebrima"/>
                 <a:cs typeface="Ebrima"/>
               </a:rPr>
-              <a:t>የማይጥል ነው የማይተው (2x)</a:t>
+              <a:t>የማይጥል ነው የማይተው 2x</a:t>
             </a:r>
           </a:p>
           <a:p>
@@ -3313,7 +3313,7 @@
                 <a:ea typeface="Ebrima"/>
                 <a:cs typeface="Ebrima"/>
               </a:rPr>
-              <a:t>ከወደድክልኝማ ምሥጋናዬን ላሰማ (2x)</a:t>
+              <a:t>ከወደድክልኝማ ምሥጋናዬን ላሰማ 2x</a:t>
             </a:r>
           </a:p>
           <a:p>
@@ -3367,7 +3367,7 @@
                 <a:ea typeface="Ebrima"/>
                 <a:cs typeface="Ebrima"/>
               </a:rPr>
-              <a:t>የማይጥል ነው የማይተው (2x)</a:t>
+              <a:t>የማይጥል ነው የማይተው 2x</a:t>
             </a:r>
           </a:p>
           <a:p>
@@ -3403,7 +3403,7 @@
                 <a:ea typeface="Ebrima"/>
                 <a:cs typeface="Ebrima"/>
               </a:rPr>
-              <a:t>ከወደድክልኝማ ምሥጋናዬን ላሰማ (2x)</a:t>
+              <a:t>ከወደድክልኝማ ምሥጋናዬን ላሰማ 2x</a:t>
             </a:r>
           </a:p>
           <a:p>
@@ -3457,7 +3457,7 @@
                 <a:ea typeface="Ebrima"/>
                 <a:cs typeface="Ebrima"/>
               </a:rPr>
-              <a:t>የማይጥል ነው የማይተው (4x)</a:t>
+              <a:t>የማይጥል ነው የማይተው 4x</a:t>
             </a:r>
           </a:p>
         </p:txBody>
